--- a/assets/powerpoints/module-n3-vetements/A4-un-manteau-une-tuque.pptx
+++ b/assets/powerpoints/module-n3-vetements/A4-un-manteau-une-tuque.pptx
@@ -9179,7 +9179,25 @@
                 </a:solidFill>
                 <a:latin typeface="Verdana"/>
               </a:rPr>
-              <a:t>Ce sont deux objets qu'on achète ensemble : on ne dit jamais « une botte » en magasinant. Pour en compter une, on dit « &lt;b&gt;une paire de&lt;/b&gt; bottes ». Même chose pour les souliers et les chaussettes.</a:t>
+              <a:t>Ce sont deux objets qu'on achète ensemble : on ne dit jamais « une botte » en magasinant. Pour en compter une, on dit « </a:t>
+            </a:r>
+            <a:r>
+              <a:rPr sz="2000" b="1" i="0">
+                <a:solidFill>
+                  <a:srgbClr val="4B4F52"/>
+                </a:solidFill>
+                <a:latin typeface="Verdana"/>
+              </a:rPr>
+              <a:t>une paire de</a:t>
+            </a:r>
+            <a:r>
+              <a:rPr sz="2000" b="0" i="0">
+                <a:solidFill>
+                  <a:srgbClr val="4B4F52"/>
+                </a:solidFill>
+                <a:latin typeface="Verdana"/>
+              </a:rPr>
+              <a:t> bottes ». Même chose pour les souliers et les chaussettes.</a:t>
             </a:r>
           </a:p>
         </p:txBody>
@@ -9643,7 +9661,25 @@
                 </a:solidFill>
                 <a:latin typeface="Verdana"/>
               </a:rPr>
-              <a:t>« Je cherche &lt;b&gt;un&lt;/b&gt; manteau. » Un mot isolé se perd ; une phrase se retient.</a:t>
+              <a:t>« Je cherche </a:t>
+            </a:r>
+            <a:r>
+              <a:rPr sz="1600" b="1" i="0">
+                <a:solidFill>
+                  <a:srgbClr val="3A3D40"/>
+                </a:solidFill>
+                <a:latin typeface="Verdana"/>
+              </a:rPr>
+              <a:t>un</a:t>
+            </a:r>
+            <a:r>
+              <a:rPr sz="1600" b="0" i="0">
+                <a:solidFill>
+                  <a:srgbClr val="3A3D40"/>
+                </a:solidFill>
+                <a:latin typeface="Verdana"/>
+              </a:rPr>
+              <a:t> manteau. » Un mot isolé se perd ; une phrase se retient.</a:t>
             </a:r>
           </a:p>
         </p:txBody>
